--- a/Student_Result_Analyzer_Presentation.pptx
+++ b/Student_Result_Analyzer_Presentation.pptx
@@ -1505,8 +1505,8 @@
         </p:nvSpPr>
         <p:spPr>
           <a:xfrm>
-            <a:off x="1143225" y="685800"/>
-            <a:ext cx="4572225" cy="3429000"/>
+            <a:off x="381000" y="685800"/>
+            <a:ext cx="6096000" cy="3429000"/>
           </a:xfrm>
           <a:custGeom>
             <a:avLst/>
@@ -1713,8 +1713,8 @@
         </p:nvSpPr>
         <p:spPr>
           <a:xfrm>
-            <a:off x="1143225" y="685800"/>
-            <a:ext cx="4572225" cy="3429000"/>
+            <a:off x="381000" y="685800"/>
+            <a:ext cx="6096000" cy="3429000"/>
           </a:xfrm>
           <a:custGeom>
             <a:avLst/>
@@ -11943,6 +11943,36 @@
           </a:ln>
         </p:spPr>
       </p:pic>
+      <p:pic>
+        <p:nvPicPr>
+          <p:cNvPr id="3" name="Picture 2">
+            <a:extLst>
+              <a:ext uri="{FF2B5EF4-FFF2-40B4-BE49-F238E27FC236}">
+                <a16:creationId xmlns:a16="http://schemas.microsoft.com/office/drawing/2014/main" id="{247F9718-B985-BD25-D637-B829E7F51F17}"/>
+              </a:ext>
+            </a:extLst>
+          </p:cNvPr>
+          <p:cNvPicPr>
+            <a:picLocks noChangeAspect="1"/>
+          </p:cNvPicPr>
+          <p:nvPr/>
+        </p:nvPicPr>
+        <p:blipFill>
+          <a:blip r:embed="rId6"/>
+          <a:stretch>
+            <a:fillRect/>
+          </a:stretch>
+        </p:blipFill>
+        <p:spPr>
+          <a:xfrm>
+            <a:off x="0" y="0"/>
+            <a:ext cx="2182091" cy="637842"/>
+          </a:xfrm>
+          <a:prstGeom prst="rect">
+            <a:avLst/>
+          </a:prstGeom>
+        </p:spPr>
+      </p:pic>
     </p:spTree>
   </p:cSld>
   <p:clrMapOvr>
@@ -13241,6 +13271,36 @@
           <a:ln>
             <a:noFill/>
           </a:ln>
+        </p:spPr>
+      </p:pic>
+      <p:pic>
+        <p:nvPicPr>
+          <p:cNvPr id="3" name="Picture 2">
+            <a:extLst>
+              <a:ext uri="{FF2B5EF4-FFF2-40B4-BE49-F238E27FC236}">
+                <a16:creationId xmlns:a16="http://schemas.microsoft.com/office/drawing/2014/main" id="{F0E1167D-FEA5-73FF-2D49-BC101AFA031D}"/>
+              </a:ext>
+            </a:extLst>
+          </p:cNvPr>
+          <p:cNvPicPr>
+            <a:picLocks noChangeAspect="1"/>
+          </p:cNvPicPr>
+          <p:nvPr/>
+        </p:nvPicPr>
+        <p:blipFill>
+          <a:blip r:embed="rId8"/>
+          <a:stretch>
+            <a:fillRect/>
+          </a:stretch>
+        </p:blipFill>
+        <p:spPr>
+          <a:xfrm>
+            <a:off x="0" y="0"/>
+            <a:ext cx="2182091" cy="637842"/>
+          </a:xfrm>
+          <a:prstGeom prst="rect">
+            <a:avLst/>
+          </a:prstGeom>
         </p:spPr>
       </p:pic>
     </p:spTree>
@@ -14217,6 +14277,36 @@
           <a:ln>
             <a:noFill/>
           </a:ln>
+        </p:spPr>
+      </p:pic>
+      <p:pic>
+        <p:nvPicPr>
+          <p:cNvPr id="5" name="Picture 4">
+            <a:extLst>
+              <a:ext uri="{FF2B5EF4-FFF2-40B4-BE49-F238E27FC236}">
+                <a16:creationId xmlns:a16="http://schemas.microsoft.com/office/drawing/2014/main" id="{A7E1966A-B1C1-4467-EC00-219E867D6721}"/>
+              </a:ext>
+            </a:extLst>
+          </p:cNvPr>
+          <p:cNvPicPr>
+            <a:picLocks noChangeAspect="1"/>
+          </p:cNvPicPr>
+          <p:nvPr/>
+        </p:nvPicPr>
+        <p:blipFill>
+          <a:blip r:embed="rId10"/>
+          <a:stretch>
+            <a:fillRect/>
+          </a:stretch>
+        </p:blipFill>
+        <p:spPr>
+          <a:xfrm>
+            <a:off x="0" y="0"/>
+            <a:ext cx="2182091" cy="637842"/>
+          </a:xfrm>
+          <a:prstGeom prst="rect">
+            <a:avLst/>
+          </a:prstGeom>
         </p:spPr>
       </p:pic>
     </p:spTree>
@@ -15310,6 +15400,36 @@
           </a:ln>
         </p:spPr>
       </p:pic>
+      <p:pic>
+        <p:nvPicPr>
+          <p:cNvPr id="8" name="Picture 7">
+            <a:extLst>
+              <a:ext uri="{FF2B5EF4-FFF2-40B4-BE49-F238E27FC236}">
+                <a16:creationId xmlns:a16="http://schemas.microsoft.com/office/drawing/2014/main" id="{BF416F80-C631-02E8-4AEC-A911C0528D32}"/>
+              </a:ext>
+            </a:extLst>
+          </p:cNvPr>
+          <p:cNvPicPr>
+            <a:picLocks noChangeAspect="1"/>
+          </p:cNvPicPr>
+          <p:nvPr/>
+        </p:nvPicPr>
+        <p:blipFill>
+          <a:blip r:embed="rId12"/>
+          <a:stretch>
+            <a:fillRect/>
+          </a:stretch>
+        </p:blipFill>
+        <p:spPr>
+          <a:xfrm>
+            <a:off x="0" y="0"/>
+            <a:ext cx="2182091" cy="637842"/>
+          </a:xfrm>
+          <a:prstGeom prst="rect">
+            <a:avLst/>
+          </a:prstGeom>
+        </p:spPr>
+      </p:pic>
     </p:spTree>
   </p:cSld>
   <p:clrMapOvr>
@@ -17575,6 +17695,36 @@
           <a:ln>
             <a:noFill/>
           </a:ln>
+        </p:spPr>
+      </p:pic>
+      <p:pic>
+        <p:nvPicPr>
+          <p:cNvPr id="3" name="Picture 2">
+            <a:extLst>
+              <a:ext uri="{FF2B5EF4-FFF2-40B4-BE49-F238E27FC236}">
+                <a16:creationId xmlns:a16="http://schemas.microsoft.com/office/drawing/2014/main" id="{0FEA8C1E-53E2-AAE2-4D3A-D2FFF551A565}"/>
+              </a:ext>
+            </a:extLst>
+          </p:cNvPr>
+          <p:cNvPicPr>
+            <a:picLocks noChangeAspect="1"/>
+          </p:cNvPicPr>
+          <p:nvPr/>
+        </p:nvPicPr>
+        <p:blipFill>
+          <a:blip r:embed="rId15"/>
+          <a:stretch>
+            <a:fillRect/>
+          </a:stretch>
+        </p:blipFill>
+        <p:spPr>
+          <a:xfrm>
+            <a:off x="0" y="0"/>
+            <a:ext cx="2182091" cy="637842"/>
+          </a:xfrm>
+          <a:prstGeom prst="rect">
+            <a:avLst/>
+          </a:prstGeom>
         </p:spPr>
       </p:pic>
     </p:spTree>
@@ -18752,6 +18902,36 @@
           </a:prstGeom>
         </p:spPr>
       </p:pic>
+      <p:pic>
+        <p:nvPicPr>
+          <p:cNvPr id="4" name="Picture 3">
+            <a:extLst>
+              <a:ext uri="{FF2B5EF4-FFF2-40B4-BE49-F238E27FC236}">
+                <a16:creationId xmlns:a16="http://schemas.microsoft.com/office/drawing/2014/main" id="{A7787FAA-8C2D-9660-62B4-2B28D3006F1C}"/>
+              </a:ext>
+            </a:extLst>
+          </p:cNvPr>
+          <p:cNvPicPr>
+            <a:picLocks noChangeAspect="1"/>
+          </p:cNvPicPr>
+          <p:nvPr/>
+        </p:nvPicPr>
+        <p:blipFill>
+          <a:blip r:embed="rId10"/>
+          <a:stretch>
+            <a:fillRect/>
+          </a:stretch>
+        </p:blipFill>
+        <p:spPr>
+          <a:xfrm>
+            <a:off x="0" y="0"/>
+            <a:ext cx="2182091" cy="637842"/>
+          </a:xfrm>
+          <a:prstGeom prst="rect">
+            <a:avLst/>
+          </a:prstGeom>
+        </p:spPr>
+      </p:pic>
     </p:spTree>
   </p:cSld>
   <p:clrMapOvr>
@@ -19313,6 +19493,36 @@
           <a:xfrm>
             <a:off x="5857876" y="1578887"/>
             <a:ext cx="5993038" cy="3566360"/>
+          </a:xfrm>
+          <a:prstGeom prst="rect">
+            <a:avLst/>
+          </a:prstGeom>
+        </p:spPr>
+      </p:pic>
+      <p:pic>
+        <p:nvPicPr>
+          <p:cNvPr id="4" name="Picture 3">
+            <a:extLst>
+              <a:ext uri="{FF2B5EF4-FFF2-40B4-BE49-F238E27FC236}">
+                <a16:creationId xmlns:a16="http://schemas.microsoft.com/office/drawing/2014/main" id="{B42E1974-5259-4F1D-53C5-2646D6AA883C}"/>
+              </a:ext>
+            </a:extLst>
+          </p:cNvPr>
+          <p:cNvPicPr>
+            <a:picLocks noChangeAspect="1"/>
+          </p:cNvPicPr>
+          <p:nvPr/>
+        </p:nvPicPr>
+        <p:blipFill>
+          <a:blip r:embed="rId6"/>
+          <a:stretch>
+            <a:fillRect/>
+          </a:stretch>
+        </p:blipFill>
+        <p:spPr>
+          <a:xfrm>
+            <a:off x="0" y="0"/>
+            <a:ext cx="2182091" cy="637842"/>
           </a:xfrm>
           <a:prstGeom prst="rect">
             <a:avLst/>
@@ -20314,6 +20524,36 @@
           </a:ln>
         </p:spPr>
       </p:pic>
+      <p:pic>
+        <p:nvPicPr>
+          <p:cNvPr id="3" name="Picture 2">
+            <a:extLst>
+              <a:ext uri="{FF2B5EF4-FFF2-40B4-BE49-F238E27FC236}">
+                <a16:creationId xmlns:a16="http://schemas.microsoft.com/office/drawing/2014/main" id="{690E41BB-E611-ECEA-96A3-F83CBE00E3F4}"/>
+              </a:ext>
+            </a:extLst>
+          </p:cNvPr>
+          <p:cNvPicPr>
+            <a:picLocks noChangeAspect="1"/>
+          </p:cNvPicPr>
+          <p:nvPr/>
+        </p:nvPicPr>
+        <p:blipFill>
+          <a:blip r:embed="rId31"/>
+          <a:stretch>
+            <a:fillRect/>
+          </a:stretch>
+        </p:blipFill>
+        <p:spPr>
+          <a:xfrm>
+            <a:off x="0" y="0"/>
+            <a:ext cx="2182091" cy="637842"/>
+          </a:xfrm>
+          <a:prstGeom prst="rect">
+            <a:avLst/>
+          </a:prstGeom>
+        </p:spPr>
+      </p:pic>
     </p:spTree>
   </p:cSld>
   <p:clrMapOvr>
@@ -21731,6 +21971,36 @@
           <a:ln>
             <a:noFill/>
           </a:ln>
+        </p:spPr>
+      </p:pic>
+      <p:pic>
+        <p:nvPicPr>
+          <p:cNvPr id="3" name="Picture 2">
+            <a:extLst>
+              <a:ext uri="{FF2B5EF4-FFF2-40B4-BE49-F238E27FC236}">
+                <a16:creationId xmlns:a16="http://schemas.microsoft.com/office/drawing/2014/main" id="{D809FCD4-7B50-EB40-A975-F0269AF95359}"/>
+              </a:ext>
+            </a:extLst>
+          </p:cNvPr>
+          <p:cNvPicPr>
+            <a:picLocks noChangeAspect="1"/>
+          </p:cNvPicPr>
+          <p:nvPr/>
+        </p:nvPicPr>
+        <p:blipFill>
+          <a:blip r:embed="rId12"/>
+          <a:stretch>
+            <a:fillRect/>
+          </a:stretch>
+        </p:blipFill>
+        <p:spPr>
+          <a:xfrm>
+            <a:off x="0" y="0"/>
+            <a:ext cx="2182091" cy="637842"/>
+          </a:xfrm>
+          <a:prstGeom prst="rect">
+            <a:avLst/>
+          </a:prstGeom>
         </p:spPr>
       </p:pic>
     </p:spTree>
@@ -22215,6 +22485,36 @@
           </a:p>
         </p:txBody>
       </p:sp>
+      <p:pic>
+        <p:nvPicPr>
+          <p:cNvPr id="3" name="Picture 2">
+            <a:extLst>
+              <a:ext uri="{FF2B5EF4-FFF2-40B4-BE49-F238E27FC236}">
+                <a16:creationId xmlns:a16="http://schemas.microsoft.com/office/drawing/2014/main" id="{2C9F9AE1-5395-A743-0D8E-51C46D1F28DC}"/>
+              </a:ext>
+            </a:extLst>
+          </p:cNvPr>
+          <p:cNvPicPr>
+            <a:picLocks noChangeAspect="1"/>
+          </p:cNvPicPr>
+          <p:nvPr/>
+        </p:nvPicPr>
+        <p:blipFill>
+          <a:blip r:embed="rId16"/>
+          <a:stretch>
+            <a:fillRect/>
+          </a:stretch>
+        </p:blipFill>
+        <p:spPr>
+          <a:xfrm>
+            <a:off x="0" y="0"/>
+            <a:ext cx="2182091" cy="637842"/>
+          </a:xfrm>
+          <a:prstGeom prst="rect">
+            <a:avLst/>
+          </a:prstGeom>
+        </p:spPr>
+      </p:pic>
     </p:spTree>
   </p:cSld>
   <p:clrMapOvr>
